--- a/deliverables/video-7-slides/out/Video_7_Main_Slides.pptx
+++ b/deliverables/video-7-slides/out/Video_7_Main_Slides.pptx
@@ -1532,12 +1532,12 @@
           <a:p/>
           <a:p>
             <a:r>
-              <a:t>The quoted line is an example of defensible evidence, not a claim about</a:t>
-            </a:r>
-          </a:p>
-          <a:p>
-            <a:r>
-              <a:t>Temidayo. Read it as an example.</a:t>
+              <a:t>The gold line is an instruction to the viewer, not a claim about Temidayo or</a:t>
+            </a:r>
+          </a:p>
+          <a:p>
+            <a:r>
+              <a:t>about any specific piece of work. Deliver it as guidance.</a:t>
             </a:r>
           </a:p>
           <a:p/>
@@ -6149,7 +6149,7 @@
             <a:r>
               <a:rPr sz="1700" b="0" i="0">
                 <a:solidFill>
-                  <a:srgbClr val="3E506B"/>
+                  <a:srgbClr val="8E9CB2"/>
                 </a:solidFill>
                 <a:latin typeface="DM Sans"/>
                 <a:ea typeface="DM Sans"/>
@@ -6161,7 +6161,7 @@
             <a:r>
               <a:rPr sz="1700" b="0" i="0">
                 <a:solidFill>
-                  <a:srgbClr val="3E506B"/>
+                  <a:srgbClr val="8E9CB2"/>
                 </a:solidFill>
                 <a:latin typeface="DM Sans"/>
                 <a:ea typeface="DM Sans"/>
@@ -9058,8 +9058,8 @@
         </p:nvSpPr>
         <p:spPr>
           <a:xfrm>
-            <a:off x="1016000" y="3048000"/>
-            <a:ext cx="10287000" cy="755650"/>
+            <a:off x="1016000" y="3022600"/>
+            <a:ext cx="10287000" cy="812800"/>
           </a:xfrm>
           <a:prstGeom prst="rect">
             <a:avLst/>
@@ -9074,31 +9074,40 @@
           <a:p>
             <a:pPr algn="l">
               <a:lnSpc>
-                <a:spcPct val="132000"/>
+                <a:spcPct val="114000"/>
               </a:lnSpc>
             </a:pPr>
             <a:r>
-              <a:rPr sz="2100" b="0" i="0">
+              <a:rPr sz="2300" b="1" i="0">
                 <a:solidFill>
                   <a:srgbClr val="C9A84C"/>
+                </a:solidFill>
+                <a:latin typeface="Montserrat"/>
+                <a:ea typeface="Montserrat"/>
+                <a:cs typeface="Montserrat"/>
+              </a:rPr>
+              <a:t>CONTINUED USE IS EVIDENCE.</a:t>
+            </a:r>
+          </a:p>
+          <a:p>
+            <a:pPr algn="l">
+              <a:lnSpc>
+                <a:spcPct val="130000"/>
+              </a:lnSpc>
+              <a:spcBef>
+                <a:spcPts val="900"/>
+              </a:spcBef>
+            </a:pPr>
+            <a:r>
+              <a:rPr sz="1900" b="0" i="0">
+                <a:solidFill>
+                  <a:srgbClr val="B9C3D2"/>
                 </a:solidFill>
                 <a:latin typeface="DM Sans"/>
                 <a:ea typeface="DM Sans"/>
                 <a:cs typeface="DM Sans"/>
               </a:rPr>
-              <a:t>“Used by every team in the region for two years</a:t>
-            </a:r>
-            <a:br/>
-            <a:r>
-              <a:rPr sz="2100" b="0" i="0">
-                <a:solidFill>
-                  <a:srgbClr val="C9A84C"/>
-                </a:solidFill>
-                <a:latin typeface="DM Sans"/>
-                <a:ea typeface="DM Sans"/>
-                <a:cs typeface="DM Sans"/>
-              </a:rPr>
-              <a:t>after I left it.”</a:t>
+              <a:t>Who still used it after the handoff—and for how long?</a:t>
             </a:r>
           </a:p>
         </p:txBody>

--- a/deliverables/video-7-slides/out/Video_7_Main_Slides.pptx
+++ b/deliverables/video-7-slides/out/Video_7_Main_Slides.pptx
@@ -4818,19 +4818,7 @@
                 <a:ea typeface="Montserrat"/>
                 <a:cs typeface="Montserrat"/>
               </a:rPr>
-              <a:t>YOU WERE NOT</a:t>
-            </a:r>
-            <a:br/>
-            <a:r>
-              <a:rPr sz="3500" b="1" i="0">
-                <a:solidFill>
-                  <a:srgbClr val="F5F1E8"/>
-                </a:solidFill>
-                <a:latin typeface="Montserrat"/>
-                <a:ea typeface="Montserrat"/>
-                <a:cs typeface="Montserrat"/>
-              </a:rPr>
-              <a:t>IMPROVING SOMETHING.</a:t>
+              <a:t>BUILDING WHILE OPERATING</a:t>
             </a:r>
           </a:p>
         </p:txBody>
@@ -4915,7 +4903,19 @@
                 <a:ea typeface="Montserrat"/>
                 <a:cs typeface="Montserrat"/>
               </a:rPr>
-              <a:t>YOU WERE THE BEFORE.</a:t>
+              <a:t>THE INFRASTRUCTURE</a:t>
+            </a:r>
+            <a:br/>
+            <a:r>
+              <a:rPr sz="3500" b="1" i="0">
+                <a:solidFill>
+                  <a:srgbClr val="C9A84C"/>
+                </a:solidFill>
+                <a:latin typeface="Montserrat"/>
+                <a:ea typeface="Montserrat"/>
+                <a:cs typeface="Montserrat"/>
+              </a:rPr>
+              <a:t>WAS STILL MATURING.</a:t>
             </a:r>
           </a:p>
         </p:txBody>
@@ -6034,7 +6034,7 @@
                 <a:ea typeface="Montserrat"/>
                 <a:cs typeface="Montserrat"/>
               </a:rPr>
-              <a:t>HOW TO EXPLAIN A</a:t>
+              <a:t>HOW TO EXPLAIN YOUR</a:t>
             </a:r>
             <a:br/>
             <a:r>
@@ -6046,31 +6046,7 @@
                 <a:ea typeface="Montserrat"/>
                 <a:cs typeface="Montserrat"/>
               </a:rPr>
-              <a:t>NONLINEAR CAREER</a:t>
-            </a:r>
-            <a:br/>
-            <a:r>
-              <a:rPr sz="2600" b="1" i="0">
-                <a:solidFill>
-                  <a:srgbClr val="F5F1E8"/>
-                </a:solidFill>
-                <a:latin typeface="Montserrat"/>
-                <a:ea typeface="Montserrat"/>
-                <a:cs typeface="Montserrat"/>
-              </a:rPr>
-              <a:t>WITHOUT LOOKING</a:t>
-            </a:r>
-            <a:br/>
-            <a:r>
-              <a:rPr sz="2600" b="1" i="0">
-                <a:solidFill>
-                  <a:srgbClr val="F5F1E8"/>
-                </a:solidFill>
-                <a:latin typeface="Montserrat"/>
-                <a:ea typeface="Montserrat"/>
-                <a:cs typeface="Montserrat"/>
-              </a:rPr>
-              <a:t>UNFOCUSED</a:t>
+              <a:t>CAREER CHANGE</a:t>
             </a:r>
           </a:p>
         </p:txBody>
@@ -7107,19 +7083,7 @@
                 <a:ea typeface="Montserrat"/>
                 <a:cs typeface="Montserrat"/>
               </a:rPr>
-              <a:t>DOCUMENT THE ABSENCE</a:t>
-            </a:r>
-            <a:br/>
-            <a:r>
-              <a:rPr sz="3200" b="1" i="0">
-                <a:solidFill>
-                  <a:srgbClr val="0F2346"/>
-                </a:solidFill>
-                <a:latin typeface="Montserrat"/>
-                <a:ea typeface="Montserrat"/>
-                <a:cs typeface="Montserrat"/>
-              </a:rPr>
-              <a:t>YOU WALKED INTO.</a:t>
+              <a:t>RECONSTRUCT THE STARTING CONDITION</a:t>
             </a:r>
           </a:p>
         </p:txBody>
@@ -7204,28 +7168,7 @@
                 <a:ea typeface="DM Sans"/>
                 <a:cs typeface="DM Sans"/>
               </a:rPr>
-              <a:t>Not the state of the world when you arrived.</a:t>
-            </a:r>
-          </a:p>
-          <a:p>
-            <a:pPr algn="l">
-              <a:lnSpc>
-                <a:spcPct val="134000"/>
-              </a:lnSpc>
-              <a:spcBef>
-                <a:spcPts val="700"/>
-              </a:spcBef>
-            </a:pPr>
-            <a:r>
-              <a:rPr sz="2100" b="0" i="0">
-                <a:solidFill>
-                  <a:srgbClr val="0F2346"/>
-                </a:solidFill>
-                <a:latin typeface="DM Sans"/>
-                <a:ea typeface="DM Sans"/>
-                <a:cs typeface="DM Sans"/>
-              </a:rPr>
-              <a:t>What was missing from it.</a:t>
+              <a:t>What was incomplete, inconsistent or difficult before the work?</a:t>
             </a:r>
           </a:p>
         </p:txBody>
@@ -7292,7 +7235,7 @@
                 <a:ea typeface="Montserrat"/>
                 <a:cs typeface="Montserrat"/>
               </a:rPr>
-              <a:t>WHAT DID NOT EXIST?</a:t>
+              <a:t>WHAT WAS STILL MATURING?</a:t>
             </a:r>
           </a:p>
         </p:txBody>
@@ -7350,7 +7293,7 @@
         <p:spPr>
           <a:xfrm>
             <a:off x="1016000" y="2209800"/>
-            <a:ext cx="4826000" cy="368300"/>
+            <a:ext cx="5358384" cy="368300"/>
           </a:xfrm>
           <a:prstGeom prst="rect">
             <a:avLst/>
@@ -7377,7 +7320,7 @@
                 <a:ea typeface="DM Sans"/>
                 <a:cs typeface="DM Sans"/>
               </a:rPr>
-              <a:t>No owner</a:t>
+              <a:t>Change-management infrastructure</a:t>
             </a:r>
           </a:p>
         </p:txBody>
@@ -7435,7 +7378,7 @@
         <p:spPr>
           <a:xfrm>
             <a:off x="1016000" y="3022600"/>
-            <a:ext cx="4826000" cy="368300"/>
+            <a:ext cx="5358384" cy="368300"/>
           </a:xfrm>
           <a:prstGeom prst="rect">
             <a:avLst/>
@@ -7462,7 +7405,7 @@
                 <a:ea typeface="DM Sans"/>
                 <a:cs typeface="DM Sans"/>
               </a:rPr>
-              <a:t>No system</a:t>
+              <a:t>Operating-model governance</a:t>
             </a:r>
           </a:p>
         </p:txBody>
@@ -7520,7 +7463,7 @@
         <p:spPr>
           <a:xfrm>
             <a:off x="1016000" y="3835400"/>
-            <a:ext cx="4826000" cy="368300"/>
+            <a:ext cx="5358384" cy="368300"/>
           </a:xfrm>
           <a:prstGeom prst="rect">
             <a:avLst/>
@@ -7547,7 +7490,7 @@
                 <a:ea typeface="DM Sans"/>
                 <a:cs typeface="DM Sans"/>
               </a:rPr>
-              <a:t>No shared language</a:t>
+              <a:t>Organizational-effectiveness mechanisms</a:t>
             </a:r>
           </a:p>
         </p:txBody>
@@ -7605,7 +7548,7 @@
         <p:spPr>
           <a:xfrm>
             <a:off x="1016000" y="4648200"/>
-            <a:ext cx="4826000" cy="368300"/>
+            <a:ext cx="5358384" cy="368300"/>
           </a:xfrm>
           <a:prstGeom prst="rect">
             <a:avLst/>
@@ -7632,7 +7575,7 @@
                 <a:ea typeface="DM Sans"/>
                 <a:cs typeface="DM Sans"/>
               </a:rPr>
-              <a:t>No baseline anyone trusted</a:t>
+              <a:t>Leadership enablement</a:t>
             </a:r>
           </a:p>
         </p:txBody>
@@ -7690,7 +7633,7 @@
         <p:spPr>
           <a:xfrm>
             <a:off x="6477000" y="2209800"/>
-            <a:ext cx="4826000" cy="368300"/>
+            <a:ext cx="5358384" cy="368300"/>
           </a:xfrm>
           <a:prstGeom prst="rect">
             <a:avLst/>
@@ -7717,7 +7660,7 @@
                 <a:ea typeface="DM Sans"/>
                 <a:cs typeface="DM Sans"/>
               </a:rPr>
-              <a:t>No decision process</a:t>
+              <a:t>Performance rhythms</a:t>
             </a:r>
           </a:p>
         </p:txBody>
@@ -7775,7 +7718,7 @@
         <p:spPr>
           <a:xfrm>
             <a:off x="6477000" y="3022600"/>
-            <a:ext cx="4826000" cy="368300"/>
+            <a:ext cx="5358384" cy="368300"/>
           </a:xfrm>
           <a:prstGeom prst="rect">
             <a:avLst/>
@@ -7802,7 +7745,7 @@
                 <a:ea typeface="DM Sans"/>
                 <a:cs typeface="DM Sans"/>
               </a:rPr>
-              <a:t>No relationships across functions</a:t>
+              <a:t>Onboarding infrastructure</a:t>
             </a:r>
           </a:p>
         </p:txBody>
@@ -7860,7 +7803,7 @@
         <p:spPr>
           <a:xfrm>
             <a:off x="6477000" y="3835400"/>
-            <a:ext cx="4826000" cy="368300"/>
+            <a:ext cx="5358384" cy="368300"/>
           </a:xfrm>
           <a:prstGeom prst="rect">
             <a:avLst/>
@@ -7887,7 +7830,7 @@
                 <a:ea typeface="DM Sans"/>
                 <a:cs typeface="DM Sans"/>
               </a:rPr>
-              <a:t>No standard</a:t>
+              <a:t>Cross-functional integration / governance</a:t>
             </a:r>
           </a:p>
         </p:txBody>
@@ -7901,91 +7844,6 @@
         <p:spPr>
           <a:xfrm>
             <a:off x="6477000" y="4330700"/>
-            <a:ext cx="4445000" cy="12700"/>
-          </a:xfrm>
-          <a:prstGeom prst="rect">
-            <a:avLst/>
-          </a:prstGeom>
-          <a:solidFill>
-            <a:srgbClr val="223A60"/>
-          </a:solidFill>
-          <a:ln>
-            <a:noFill/>
-          </a:ln>
-          <a:effectLst/>
-        </p:spPr>
-        <p:style>
-          <a:lnRef idx="1">
-            <a:schemeClr val="accent1"/>
-          </a:lnRef>
-          <a:fillRef idx="3">
-            <a:schemeClr val="accent1"/>
-          </a:fillRef>
-          <a:effectRef idx="2">
-            <a:schemeClr val="accent1"/>
-          </a:effectRef>
-          <a:fontRef idx="minor">
-            <a:schemeClr val="lt1"/>
-          </a:fontRef>
-        </p:style>
-        <p:txBody>
-          <a:bodyPr rtlCol="0" anchor="ctr"/>
-          <a:lstStyle/>
-          <a:p>
-            <a:pPr algn="ctr"/>
-          </a:p>
-        </p:txBody>
-      </p:sp>
-      <p:sp>
-        <p:nvSpPr>
-          <p:cNvPr id="18" name="TextBox 17"/>
-          <p:cNvSpPr txBox="1"/>
-          <p:nvPr/>
-        </p:nvSpPr>
-        <p:spPr>
-          <a:xfrm>
-            <a:off x="6477000" y="4648200"/>
-            <a:ext cx="4826000" cy="368300"/>
-          </a:xfrm>
-          <a:prstGeom prst="rect">
-            <a:avLst/>
-          </a:prstGeom>
-          <a:noFill/>
-        </p:spPr>
-        <p:txBody>
-          <a:bodyPr wrap="square" lIns="0" rIns="0" tIns="0" bIns="0" anchor="t">
-            <a:spAutoFit/>
-          </a:bodyPr>
-          <a:lstStyle/>
-          <a:p>
-            <a:pPr algn="l">
-              <a:lnSpc>
-                <a:spcPct val="120000"/>
-              </a:lnSpc>
-            </a:pPr>
-            <a:r>
-              <a:rPr sz="2100" b="0" i="0">
-                <a:solidFill>
-                  <a:srgbClr val="F5F1E8"/>
-                </a:solidFill>
-                <a:latin typeface="DM Sans"/>
-                <a:ea typeface="DM Sans"/>
-                <a:cs typeface="DM Sans"/>
-              </a:rPr>
-              <a:t>No repeatable method</a:t>
-            </a:r>
-          </a:p>
-        </p:txBody>
-      </p:sp>
-      <p:sp>
-        <p:nvSpPr>
-          <p:cNvPr id="19" name="Rectangle 18"/>
-          <p:cNvSpPr/>
-          <p:nvPr/>
-        </p:nvSpPr>
-        <p:spPr>
-          <a:xfrm>
-            <a:off x="6477000" y="5143500"/>
             <a:ext cx="4445000" cy="12700"/>
           </a:xfrm>
           <a:prstGeom prst="rect">

--- a/deliverables/video-7-slides/out/Video_7_Main_Slides.pptx
+++ b/deliverables/video-7-slides/out/Video_7_Main_Slides.pptx
@@ -5064,7 +5064,7 @@
                 <a:ea typeface="DM Sans"/>
                 <a:cs typeface="DM Sans"/>
               </a:rPr>
-              <a:t>What did not exist.</a:t>
+              <a:t>What was incomplete, inconsistent or difficult?</a:t>
             </a:r>
           </a:p>
         </p:txBody>
@@ -6433,7 +6433,7 @@
                 <a:ea typeface="Montserrat"/>
                 <a:cs typeface="Montserrat"/>
               </a:rPr>
-              <a:t>FOUNDATIONAL WORK HAS NO PRIOR STATE.</a:t>
+              <a:t>FOUNDATIONAL WORK CAN LOSE ITS “BEFORE.”</a:t>
             </a:r>
           </a:p>
         </p:txBody>
@@ -6518,7 +6518,7 @@
                 <a:ea typeface="DM Sans"/>
                 <a:cs typeface="DM Sans"/>
               </a:rPr>
-              <a:t>The instrument that would have recorded it</a:t>
+              <a:t>Once the mechanism works,</a:t>
             </a:r>
             <a:br/>
             <a:r>
@@ -6530,7 +6530,7 @@
                 <a:ea typeface="DM Sans"/>
                 <a:cs typeface="DM Sans"/>
               </a:rPr>
-              <a:t>did not exist yet.</a:t>
+              <a:t>the starting condition becomes harder to see.</a:t>
             </a:r>
           </a:p>
         </p:txBody>

--- a/deliverables/video-7-slides/out/Video_7_Main_Slides.pptx
+++ b/deliverables/video-7-slides/out/Video_7_Main_Slides.pptx
@@ -5064,7 +5064,19 @@
                 <a:ea typeface="DM Sans"/>
                 <a:cs typeface="DM Sans"/>
               </a:rPr>
-              <a:t>What was incomplete, inconsistent or difficult?</a:t>
+              <a:t>What was incomplete, inconsistent,</a:t>
+            </a:r>
+            <a:br/>
+            <a:r>
+              <a:rPr sz="2000" b="0" i="0">
+                <a:solidFill>
+                  <a:srgbClr val="5A6B82"/>
+                </a:solidFill>
+                <a:latin typeface="DM Sans"/>
+                <a:ea typeface="DM Sans"/>
+                <a:cs typeface="DM Sans"/>
+              </a:rPr>
+              <a:t>or difficult before the work?</a:t>
             </a:r>
           </a:p>
         </p:txBody>
@@ -5234,7 +5246,19 @@
                 <a:ea typeface="DM Sans"/>
                 <a:cs typeface="DM Sans"/>
               </a:rPr>
-              <a:t>What you created underneath the output.</a:t>
+              <a:t>What did you help put in place,</a:t>
+            </a:r>
+            <a:br/>
+            <a:r>
+              <a:rPr sz="2000" b="0" i="0">
+                <a:solidFill>
+                  <a:srgbClr val="5A6B82"/>
+                </a:solidFill>
+                <a:latin typeface="DM Sans"/>
+                <a:ea typeface="DM Sans"/>
+                <a:cs typeface="DM Sans"/>
+              </a:rPr>
+              <a:t>improve, or make more usable?</a:t>
             </a:r>
           </a:p>
         </p:txBody>
@@ -5404,7 +5428,7 @@
                 <a:ea typeface="DM Sans"/>
                 <a:cs typeface="DM Sans"/>
               </a:rPr>
-              <a:t>What is different now—and how someone else could tell.</a:t>
+              <a:t>What changed afterward because of the work?</a:t>
             </a:r>
           </a:p>
         </p:txBody>
@@ -6433,7 +6457,7 @@
                 <a:ea typeface="Montserrat"/>
                 <a:cs typeface="Montserrat"/>
               </a:rPr>
-              <a:t>FOUNDATIONAL WORK CAN LOSE ITS “BEFORE.”</a:t>
+              <a:t>FOUNDATIONAL WORK CAN BE HARD TO SEE.</a:t>
             </a:r>
           </a:p>
         </p:txBody>
@@ -6518,7 +6542,7 @@
                 <a:ea typeface="DM Sans"/>
                 <a:cs typeface="DM Sans"/>
               </a:rPr>
-              <a:t>Once the mechanism works,</a:t>
+              <a:t>Sometimes the mechanism that would have recorded it</a:t>
             </a:r>
             <a:br/>
             <a:r>
@@ -6530,7 +6554,7 @@
                 <a:ea typeface="DM Sans"/>
                 <a:cs typeface="DM Sans"/>
               </a:rPr>
-              <a:t>the starting condition becomes harder to see.</a:t>
+              <a:t>was still maturing.</a:t>
             </a:r>
           </a:p>
         </p:txBody>
